--- a/スライド/ch11.pptx
+++ b/スライド/ch11.pptx
@@ -1426,7 +1426,7 @@
           <a:p/>
           <a:p>
             <a:r>
-              <a:t>_class: sections</a:t>
+              <a:t>_class: figure-full</a:t>
             </a:r>
           </a:p>
         </p:txBody>
@@ -1496,13 +1496,13 @@
           <a:lstStyle/>
           <a:p>
             <a:r>
-              <a:t>「予測時点で本当に手に入る情報か」を特徴量 1 つずつ問う習慣をつけさせる。</a:t>
+              <a:t>前の 1 枚に ② を足しただけ。薄い段はまだ出していない段。</a:t>
             </a:r>
           </a:p>
           <a:p/>
           <a:p>
             <a:r>
-              <a:t>_class: sections</a:t>
+              <a:t>_class: figure-full</a:t>
             </a:r>
           </a:p>
         </p:txBody>
@@ -1572,13 +1572,13 @@
           <a:lstStyle/>
           <a:p>
             <a:r>
-              <a:t>「予測時点で本当に手に入る情報か」を特徴量 1 つずつ問う習慣をつけさせる。</a:t>
+              <a:t>前の 1 枚に ③ を足しただけ。薄い段はまだ出していない段。</a:t>
             </a:r>
           </a:p>
           <a:p/>
           <a:p>
             <a:r>
-              <a:t>_class: sections</a:t>
+              <a:t>_class: figure-full</a:t>
             </a:r>
           </a:p>
         </p:txBody>
@@ -10403,59 +10403,14 @@
       <p:grpSpPr/>
       <p:sp>
         <p:nvSpPr>
-          <p:cNvPr id="2" name="TextBox 1"/>
+          <p:cNvPr id="2" name="edge:title"/>
           <p:cNvSpPr txBox="1"/>
           <p:nvPr/>
         </p:nvSpPr>
         <p:spPr>
           <a:xfrm>
-            <a:off x="566928" y="457200"/>
-            <a:ext cx="11057839" cy="658368"/>
-          </a:xfrm>
-          <a:prstGeom prst="rect">
-            <a:avLst/>
-          </a:prstGeom>
-          <a:noFill/>
-        </p:spPr>
-        <p:txBody>
-          <a:bodyPr wrap="square" lIns="0" rIns="0" tIns="0" bIns="0" anchor="ctr">
-            <a:noAutofit/>
-          </a:bodyPr>
-          <a:lstStyle/>
-          <a:p>
-            <a:pPr>
-              <a:lnSpc>
-                <a:spcPct val="106000"/>
-              </a:lnSpc>
-              <a:defRPr sz="3390" b="1">
-                <a:solidFill>
-                  <a:srgbClr val="7C332A"/>
-                </a:solidFill>
-                <a:latin typeface="Avenir Next"/>
-                <a:ea typeface="Hiragino Sans"/>
-                <a:cs typeface="Hiragino Sans"/>
-              </a:defRPr>
-            </a:pPr>
-            <a:r>
-              <a:rPr>
-                <a:ea typeface="Hiragino Sans"/>
-                <a:cs typeface="Hiragino Sans"/>
-              </a:rPr>
-              <a:t>導出 — なぜランダム分割をしてはいけないか</a:t>
-            </a:r>
-          </a:p>
-        </p:txBody>
-      </p:sp>
-      <p:sp>
-        <p:nvSpPr>
-          <p:cNvPr id="3" name="TextBox 2"/>
-          <p:cNvSpPr txBox="1"/>
-          <p:nvPr/>
-        </p:nvSpPr>
-        <p:spPr>
-          <a:xfrm>
-            <a:off x="566928" y="2384775"/>
-            <a:ext cx="11057839" cy="254000"/>
+            <a:off x="566928" y="146304"/>
+            <a:ext cx="11057839" cy="457200"/>
           </a:xfrm>
           <a:prstGeom prst="rect">
             <a:avLst/>
@@ -10468,30 +10423,60 @@
           </a:bodyPr>
           <a:lstStyle/>
           <a:p>
-            <a:r>
-              <a:rPr sz="1600" b="1">
-                <a:solidFill>
-                  <a:srgbClr val="5C7268"/>
-                </a:solidFill>
-                <a:latin typeface="Avenir Next"/>
-                <a:ea typeface="Hiragino Sans"/>
-                <a:cs typeface="Hiragino Sans"/>
-              </a:rPr>
-              <a:t>① 時系列は隣が似ている｜自己相関が高い</a:t>
-            </a:r>
-          </a:p>
-        </p:txBody>
-      </p:sp>
-      <p:sp>
-        <p:nvSpPr>
-          <p:cNvPr id="4" name="TextBox 3"/>
+            <a:pPr>
+              <a:defRPr sz="2400" b="1">
+                <a:solidFill>
+                  <a:srgbClr val="7C332A"/>
+                </a:solidFill>
+                <a:latin typeface="Avenir Next"/>
+                <a:ea typeface="Hiragino Sans"/>
+                <a:cs typeface="Hiragino Sans"/>
+              </a:defRPr>
+            </a:pPr>
+            <a:r>
+              <a:rPr>
+                <a:ea typeface="Hiragino Sans"/>
+                <a:cs typeface="Hiragino Sans"/>
+              </a:rPr>
+              <a:t>導出 — なぜランダム分割をしてはいけないか</a:t>
+            </a:r>
+          </a:p>
+        </p:txBody>
+      </p:sp>
+      <p:pic>
+        <p:nvPicPr>
+          <p:cNvPr id="3" name="Picture 2" descr="ch11_deriv_split_1.png"/>
+          <p:cNvPicPr>
+            <a:picLocks noChangeAspect="1"/>
+          </p:cNvPicPr>
+          <p:nvPr/>
+        </p:nvPicPr>
+        <p:blipFill>
+          <a:blip r:embed="rId2"/>
+          <a:stretch>
+            <a:fillRect/>
+          </a:stretch>
+        </p:blipFill>
+        <p:spPr>
+          <a:xfrm>
+            <a:off x="310469" y="713232"/>
+            <a:ext cx="11570757" cy="5532120"/>
+          </a:xfrm>
+          <a:prstGeom prst="rect">
+            <a:avLst/>
+          </a:prstGeom>
+        </p:spPr>
+      </p:pic>
+      <p:sp>
+        <p:nvSpPr>
+          <p:cNvPr id="4" name="edge:caption"/>
           <p:cNvSpPr txBox="1"/>
           <p:nvPr/>
         </p:nvSpPr>
         <p:spPr>
           <a:xfrm>
-            <a:off x="822960" y="2676875"/>
-            <a:ext cx="10801807" cy="385762"/>
+            <a:off x="228600" y="6300216"/>
+            <a:ext cx="11734495" cy="310896"/>
           </a:xfrm>
           <a:prstGeom prst="rect">
             <a:avLst/>
@@ -10504,292 +10489,24 @@
           </a:bodyPr>
           <a:lstStyle/>
           <a:p>
-            <a:pPr>
-              <a:lnSpc>
-                <a:spcPct val="130000"/>
-              </a:lnSpc>
-            </a:pPr>
-            <a:r>
-              <a:rPr sz="1500">
-                <a:solidFill>
-                  <a:srgbClr val="33221E"/>
-                </a:solidFill>
-                <a:latin typeface="Avenir Next"/>
-                <a:ea typeface="Hiragino Sans"/>
-                <a:cs typeface="Hiragino Sans"/>
-              </a:rPr>
-              <a:t>1 時間前との相関はほぼ 1。ランダムに分けると、検証データの「すぐ隣」が学習に入ってしまう。</a:t>
-            </a:r>
-          </a:p>
-        </p:txBody>
-      </p:sp>
-      <p:sp>
-        <p:nvSpPr>
-          <p:cNvPr id="5" name="Rectangle 4"/>
-          <p:cNvSpPr/>
-          <p:nvPr/>
-        </p:nvSpPr>
-        <p:spPr>
-          <a:xfrm>
-            <a:off x="566928" y="3214529"/>
-            <a:ext cx="11057839" cy="9525"/>
-          </a:xfrm>
-          <a:prstGeom prst="rect">
-            <a:avLst/>
-          </a:prstGeom>
-          <a:solidFill>
-            <a:srgbClr val="E5DCCE"/>
-          </a:solidFill>
-          <a:ln>
-            <a:noFill/>
-          </a:ln>
-          <a:effectLst/>
-        </p:spPr>
-        <p:style>
-          <a:lnRef idx="1">
-            <a:schemeClr val="accent1"/>
-          </a:lnRef>
-          <a:fillRef idx="3">
-            <a:schemeClr val="accent1"/>
-          </a:fillRef>
-          <a:effectRef idx="2">
-            <a:schemeClr val="accent1"/>
-          </a:effectRef>
-          <a:fontRef idx="minor">
-            <a:schemeClr val="lt1"/>
-          </a:fontRef>
-        </p:style>
-        <p:txBody>
-          <a:bodyPr rtlCol="0" anchor="ctr"/>
-          <a:lstStyle/>
-          <a:p>
             <a:pPr algn="ctr"/>
-          </a:p>
-        </p:txBody>
-      </p:sp>
-      <p:sp>
-        <p:nvSpPr>
-          <p:cNvPr id="6" name="build:ghost"/>
-          <p:cNvSpPr txBox="1"/>
-          <p:nvPr/>
-        </p:nvSpPr>
-        <p:spPr>
-          <a:xfrm>
-            <a:off x="566928" y="3391821"/>
-            <a:ext cx="11057839" cy="254000"/>
-          </a:xfrm>
-          <a:prstGeom prst="rect">
-            <a:avLst/>
-          </a:prstGeom>
-          <a:noFill/>
-        </p:spPr>
-        <p:txBody>
-          <a:bodyPr wrap="none" lIns="0" rIns="0" tIns="0" bIns="0">
-            <a:noAutofit/>
-          </a:bodyPr>
-          <a:lstStyle/>
-          <a:p>
-            <a:r>
-              <a:rPr sz="1600" b="1">
-                <a:solidFill>
-                  <a:srgbClr val="C1C9C5"/>
-                </a:solidFill>
-                <a:latin typeface="Avenir Next"/>
-                <a:ea typeface="Hiragino Sans"/>
-                <a:cs typeface="Hiragino Sans"/>
-              </a:rPr>
-              <a:t>② それは実質的に答えを見ている｜リーク</a:t>
-            </a:r>
-          </a:p>
-        </p:txBody>
-      </p:sp>
-      <p:sp>
-        <p:nvSpPr>
-          <p:cNvPr id="7" name="build:ghost"/>
-          <p:cNvSpPr txBox="1"/>
-          <p:nvPr/>
-        </p:nvSpPr>
-        <p:spPr>
-          <a:xfrm>
-            <a:off x="822960" y="3683921"/>
-            <a:ext cx="10801807" cy="385762"/>
-          </a:xfrm>
-          <a:prstGeom prst="rect">
-            <a:avLst/>
-          </a:prstGeom>
-          <a:noFill/>
-        </p:spPr>
-        <p:txBody>
-          <a:bodyPr wrap="square" lIns="0" rIns="0" tIns="0" bIns="0">
-            <a:noAutofit/>
-          </a:bodyPr>
-          <a:lstStyle/>
-          <a:p>
-            <a:pPr>
-              <a:lnSpc>
-                <a:spcPct val="130000"/>
-              </a:lnSpc>
-            </a:pPr>
-            <a:r>
-              <a:rPr sz="1500">
-                <a:solidFill>
-                  <a:srgbClr val="C1BCBB"/>
-                </a:solidFill>
-                <a:latin typeface="Avenir Next"/>
-                <a:ea typeface="Hiragino Sans"/>
-                <a:cs typeface="Hiragino Sans"/>
-              </a:rPr>
-              <a:t>未来の情報が学習に混ざると、検証精度は現実より良く出る。運用に出した瞬間に精度が崩れる。</a:t>
-            </a:r>
-          </a:p>
-        </p:txBody>
-      </p:sp>
-      <p:sp>
-        <p:nvSpPr>
-          <p:cNvPr id="8" name="Rectangle 7"/>
-          <p:cNvSpPr/>
-          <p:nvPr/>
-        </p:nvSpPr>
-        <p:spPr>
-          <a:xfrm>
-            <a:off x="566928" y="4221575"/>
-            <a:ext cx="11057839" cy="9525"/>
-          </a:xfrm>
-          <a:prstGeom prst="rect">
-            <a:avLst/>
-          </a:prstGeom>
-          <a:solidFill>
-            <a:srgbClr val="E5DCCE"/>
-          </a:solidFill>
-          <a:ln>
-            <a:noFill/>
-          </a:ln>
-          <a:effectLst/>
-        </p:spPr>
-        <p:style>
-          <a:lnRef idx="1">
-            <a:schemeClr val="accent1"/>
-          </a:lnRef>
-          <a:fillRef idx="3">
-            <a:schemeClr val="accent1"/>
-          </a:fillRef>
-          <a:effectRef idx="2">
-            <a:schemeClr val="accent1"/>
-          </a:effectRef>
-          <a:fontRef idx="minor">
-            <a:schemeClr val="lt1"/>
-          </a:fontRef>
-        </p:style>
-        <p:txBody>
-          <a:bodyPr rtlCol="0" anchor="ctr"/>
-          <a:lstStyle/>
-          <a:p>
-            <a:pPr algn="ctr"/>
-          </a:p>
-        </p:txBody>
-      </p:sp>
-      <p:sp>
-        <p:nvSpPr>
-          <p:cNvPr id="9" name="build:ghost"/>
-          <p:cNvSpPr txBox="1"/>
-          <p:nvPr/>
-        </p:nvSpPr>
-        <p:spPr>
-          <a:xfrm>
-            <a:off x="566928" y="4398867"/>
-            <a:ext cx="11057839" cy="254000"/>
-          </a:xfrm>
-          <a:prstGeom prst="rect">
-            <a:avLst/>
-          </a:prstGeom>
-          <a:noFill/>
-        </p:spPr>
-        <p:txBody>
-          <a:bodyPr wrap="none" lIns="0" rIns="0" tIns="0" bIns="0">
-            <a:noAutofit/>
-          </a:bodyPr>
-          <a:lstStyle/>
-          <a:p>
-            <a:r>
-              <a:rPr sz="1600" b="1">
-                <a:solidFill>
-                  <a:srgbClr val="C1C9C5"/>
-                </a:solidFill>
-                <a:latin typeface="Avenir Next"/>
-                <a:ea typeface="Hiragino Sans"/>
-                <a:cs typeface="Hiragino Sans"/>
-              </a:rPr>
-              <a:t>③ だから時間順に切る｜過去で学び、未来で試す</a:t>
-            </a:r>
-          </a:p>
-        </p:txBody>
-      </p:sp>
-      <p:sp>
-        <p:nvSpPr>
-          <p:cNvPr id="10" name="build:ghost"/>
-          <p:cNvSpPr txBox="1"/>
-          <p:nvPr/>
-        </p:nvSpPr>
-        <p:spPr>
-          <a:xfrm>
-            <a:off x="822960" y="4690967"/>
-            <a:ext cx="10801807" cy="385762"/>
-          </a:xfrm>
-          <a:prstGeom prst="rect">
-            <a:avLst/>
-          </a:prstGeom>
-          <a:noFill/>
-        </p:spPr>
-        <p:txBody>
-          <a:bodyPr wrap="square" lIns="0" rIns="0" tIns="0" bIns="0">
-            <a:noAutofit/>
-          </a:bodyPr>
-          <a:lstStyle/>
-          <a:p>
-            <a:pPr>
-              <a:lnSpc>
-                <a:spcPct val="130000"/>
-              </a:lnSpc>
-            </a:pPr>
-            <a:r>
-              <a:rPr sz="1500">
-                <a:solidFill>
-                  <a:srgbClr val="C1BCBB"/>
-                </a:solidFill>
-                <a:latin typeface="Avenir Next"/>
-                <a:ea typeface="Hiragino Sans"/>
-                <a:cs typeface="Hiragino Sans"/>
-              </a:rPr>
-              <a:t>実測では、ランダム分割は RMSE を </a:t>
-            </a:r>
-            <a:r>
-              <a:rPr sz="1500" b="1">
-                <a:solidFill>
-                  <a:srgbClr val="C1BCBB"/>
-                </a:solidFill>
-                <a:latin typeface="Avenir Next"/>
-                <a:ea typeface="Hiragino Sans"/>
-                <a:cs typeface="Hiragino Sans"/>
-              </a:rPr>
-              <a:t>41.7 → 36.1 MW</a:t>
-            </a:r>
-            <a:r>
-              <a:rPr sz="1500">
-                <a:solidFill>
-                  <a:srgbClr val="C1BCBB"/>
-                </a:solidFill>
-                <a:latin typeface="Avenir Next"/>
-                <a:ea typeface="Hiragino Sans"/>
-                <a:cs typeface="Hiragino Sans"/>
-              </a:rPr>
-              <a:t> と 14% 過小に見せる。運用では出ない性能である。</a:t>
-            </a:r>
-          </a:p>
-        </p:txBody>
-      </p:sp>
-      <p:sp>
-        <p:nvSpPr>
-          <p:cNvPr id="11" name="TextBox 10"/>
+            <a:r>
+              <a:rPr sz="1400">
+                <a:solidFill>
+                  <a:srgbClr val="71635B"/>
+                </a:solidFill>
+                <a:latin typeface="Avenir Next"/>
+                <a:ea typeface="Hiragino Sans"/>
+                <a:cs typeface="Hiragino Sans"/>
+              </a:rPr>
+              <a:t>1 時間前との相関はほぼ 1。ランダムに分けると、検証データの「すぐ隣」が学習に入ってしまう。　出典｜コード/fig_ch11.py</a:t>
+            </a:r>
+          </a:p>
+        </p:txBody>
+      </p:sp>
+      <p:sp>
+        <p:nvSpPr>
+          <p:cNvPr id="5" name="TextBox 4"/>
           <p:cNvSpPr txBox="1"/>
           <p:nvPr/>
         </p:nvSpPr>
@@ -10845,59 +10562,14 @@
       <p:grpSpPr/>
       <p:sp>
         <p:nvSpPr>
-          <p:cNvPr id="2" name="TextBox 1"/>
+          <p:cNvPr id="2" name="edge:title"/>
           <p:cNvSpPr txBox="1"/>
           <p:nvPr/>
         </p:nvSpPr>
         <p:spPr>
           <a:xfrm>
-            <a:off x="566928" y="457200"/>
-            <a:ext cx="11057839" cy="658368"/>
-          </a:xfrm>
-          <a:prstGeom prst="rect">
-            <a:avLst/>
-          </a:prstGeom>
-          <a:noFill/>
-        </p:spPr>
-        <p:txBody>
-          <a:bodyPr wrap="square" lIns="0" rIns="0" tIns="0" bIns="0" anchor="ctr">
-            <a:noAutofit/>
-          </a:bodyPr>
-          <a:lstStyle/>
-          <a:p>
-            <a:pPr>
-              <a:lnSpc>
-                <a:spcPct val="106000"/>
-              </a:lnSpc>
-              <a:defRPr sz="3390" b="1">
-                <a:solidFill>
-                  <a:srgbClr val="7C332A"/>
-                </a:solidFill>
-                <a:latin typeface="Avenir Next"/>
-                <a:ea typeface="Hiragino Sans"/>
-                <a:cs typeface="Hiragino Sans"/>
-              </a:defRPr>
-            </a:pPr>
-            <a:r>
-              <a:rPr>
-                <a:ea typeface="Hiragino Sans"/>
-                <a:cs typeface="Hiragino Sans"/>
-              </a:rPr>
-              <a:t>導出 — なぜランダム分割をしてはいけないか</a:t>
-            </a:r>
-          </a:p>
-        </p:txBody>
-      </p:sp>
-      <p:sp>
-        <p:nvSpPr>
-          <p:cNvPr id="3" name="TextBox 2"/>
-          <p:cNvSpPr txBox="1"/>
-          <p:nvPr/>
-        </p:nvSpPr>
-        <p:spPr>
-          <a:xfrm>
-            <a:off x="566928" y="2384775"/>
-            <a:ext cx="11057839" cy="254000"/>
+            <a:off x="566928" y="146304"/>
+            <a:ext cx="11057839" cy="457200"/>
           </a:xfrm>
           <a:prstGeom prst="rect">
             <a:avLst/>
@@ -10910,30 +10582,60 @@
           </a:bodyPr>
           <a:lstStyle/>
           <a:p>
-            <a:r>
-              <a:rPr sz="1600" b="1">
-                <a:solidFill>
-                  <a:srgbClr val="5C7268"/>
-                </a:solidFill>
-                <a:latin typeface="Avenir Next"/>
-                <a:ea typeface="Hiragino Sans"/>
-                <a:cs typeface="Hiragino Sans"/>
-              </a:rPr>
-              <a:t>① 時系列は隣が似ている｜自己相関が高い</a:t>
-            </a:r>
-          </a:p>
-        </p:txBody>
-      </p:sp>
-      <p:sp>
-        <p:nvSpPr>
-          <p:cNvPr id="4" name="TextBox 3"/>
+            <a:pPr>
+              <a:defRPr sz="2400" b="1">
+                <a:solidFill>
+                  <a:srgbClr val="7C332A"/>
+                </a:solidFill>
+                <a:latin typeface="Avenir Next"/>
+                <a:ea typeface="Hiragino Sans"/>
+                <a:cs typeface="Hiragino Sans"/>
+              </a:defRPr>
+            </a:pPr>
+            <a:r>
+              <a:rPr>
+                <a:ea typeface="Hiragino Sans"/>
+                <a:cs typeface="Hiragino Sans"/>
+              </a:rPr>
+              <a:t>導出 — なぜランダム分割をしてはいけないか</a:t>
+            </a:r>
+          </a:p>
+        </p:txBody>
+      </p:sp>
+      <p:pic>
+        <p:nvPicPr>
+          <p:cNvPr id="3" name="Picture 2" descr="ch11_deriv_split_2.png"/>
+          <p:cNvPicPr>
+            <a:picLocks noChangeAspect="1"/>
+          </p:cNvPicPr>
+          <p:nvPr/>
+        </p:nvPicPr>
+        <p:blipFill>
+          <a:blip r:embed="rId2"/>
+          <a:stretch>
+            <a:fillRect/>
+          </a:stretch>
+        </p:blipFill>
+        <p:spPr>
+          <a:xfrm>
+            <a:off x="310469" y="713232"/>
+            <a:ext cx="11570757" cy="5532120"/>
+          </a:xfrm>
+          <a:prstGeom prst="rect">
+            <a:avLst/>
+          </a:prstGeom>
+        </p:spPr>
+      </p:pic>
+      <p:sp>
+        <p:nvSpPr>
+          <p:cNvPr id="4" name="edge:caption"/>
           <p:cNvSpPr txBox="1"/>
           <p:nvPr/>
         </p:nvSpPr>
         <p:spPr>
           <a:xfrm>
-            <a:off x="822960" y="2676875"/>
-            <a:ext cx="10801807" cy="385762"/>
+            <a:off x="228600" y="6300216"/>
+            <a:ext cx="11734495" cy="310896"/>
           </a:xfrm>
           <a:prstGeom prst="rect">
             <a:avLst/>
@@ -10946,292 +10648,24 @@
           </a:bodyPr>
           <a:lstStyle/>
           <a:p>
-            <a:pPr>
-              <a:lnSpc>
-                <a:spcPct val="130000"/>
-              </a:lnSpc>
-            </a:pPr>
-            <a:r>
-              <a:rPr sz="1500">
-                <a:solidFill>
-                  <a:srgbClr val="33221E"/>
-                </a:solidFill>
-                <a:latin typeface="Avenir Next"/>
-                <a:ea typeface="Hiragino Sans"/>
-                <a:cs typeface="Hiragino Sans"/>
-              </a:rPr>
-              <a:t>1 時間前との相関はほぼ 1。ランダムに分けると、検証データの「すぐ隣」が学習に入ってしまう。</a:t>
-            </a:r>
-          </a:p>
-        </p:txBody>
-      </p:sp>
-      <p:sp>
-        <p:nvSpPr>
-          <p:cNvPr id="5" name="Rectangle 4"/>
-          <p:cNvSpPr/>
-          <p:nvPr/>
-        </p:nvSpPr>
-        <p:spPr>
-          <a:xfrm>
-            <a:off x="566928" y="3214529"/>
-            <a:ext cx="11057839" cy="9525"/>
-          </a:xfrm>
-          <a:prstGeom prst="rect">
-            <a:avLst/>
-          </a:prstGeom>
-          <a:solidFill>
-            <a:srgbClr val="E5DCCE"/>
-          </a:solidFill>
-          <a:ln>
-            <a:noFill/>
-          </a:ln>
-          <a:effectLst/>
-        </p:spPr>
-        <p:style>
-          <a:lnRef idx="1">
-            <a:schemeClr val="accent1"/>
-          </a:lnRef>
-          <a:fillRef idx="3">
-            <a:schemeClr val="accent1"/>
-          </a:fillRef>
-          <a:effectRef idx="2">
-            <a:schemeClr val="accent1"/>
-          </a:effectRef>
-          <a:fontRef idx="minor">
-            <a:schemeClr val="lt1"/>
-          </a:fontRef>
-        </p:style>
-        <p:txBody>
-          <a:bodyPr rtlCol="0" anchor="ctr"/>
-          <a:lstStyle/>
-          <a:p>
             <a:pPr algn="ctr"/>
-          </a:p>
-        </p:txBody>
-      </p:sp>
-      <p:sp>
-        <p:nvSpPr>
-          <p:cNvPr id="6" name="TextBox 5"/>
-          <p:cNvSpPr txBox="1"/>
-          <p:nvPr/>
-        </p:nvSpPr>
-        <p:spPr>
-          <a:xfrm>
-            <a:off x="566928" y="3391821"/>
-            <a:ext cx="11057839" cy="254000"/>
-          </a:xfrm>
-          <a:prstGeom prst="rect">
-            <a:avLst/>
-          </a:prstGeom>
-          <a:noFill/>
-        </p:spPr>
-        <p:txBody>
-          <a:bodyPr wrap="none" lIns="0" rIns="0" tIns="0" bIns="0">
-            <a:noAutofit/>
-          </a:bodyPr>
-          <a:lstStyle/>
-          <a:p>
-            <a:r>
-              <a:rPr sz="1600" b="1">
-                <a:solidFill>
-                  <a:srgbClr val="5C7268"/>
-                </a:solidFill>
-                <a:latin typeface="Avenir Next"/>
-                <a:ea typeface="Hiragino Sans"/>
-                <a:cs typeface="Hiragino Sans"/>
-              </a:rPr>
-              <a:t>② それは実質的に答えを見ている｜リーク</a:t>
-            </a:r>
-          </a:p>
-        </p:txBody>
-      </p:sp>
-      <p:sp>
-        <p:nvSpPr>
-          <p:cNvPr id="7" name="TextBox 6"/>
-          <p:cNvSpPr txBox="1"/>
-          <p:nvPr/>
-        </p:nvSpPr>
-        <p:spPr>
-          <a:xfrm>
-            <a:off x="822960" y="3683921"/>
-            <a:ext cx="10801807" cy="385762"/>
-          </a:xfrm>
-          <a:prstGeom prst="rect">
-            <a:avLst/>
-          </a:prstGeom>
-          <a:noFill/>
-        </p:spPr>
-        <p:txBody>
-          <a:bodyPr wrap="square" lIns="0" rIns="0" tIns="0" bIns="0">
-            <a:noAutofit/>
-          </a:bodyPr>
-          <a:lstStyle/>
-          <a:p>
-            <a:pPr>
-              <a:lnSpc>
-                <a:spcPct val="130000"/>
-              </a:lnSpc>
-            </a:pPr>
-            <a:r>
-              <a:rPr sz="1500">
-                <a:solidFill>
-                  <a:srgbClr val="33221E"/>
-                </a:solidFill>
-                <a:latin typeface="Avenir Next"/>
-                <a:ea typeface="Hiragino Sans"/>
-                <a:cs typeface="Hiragino Sans"/>
-              </a:rPr>
-              <a:t>未来の情報が学習に混ざると、検証精度は現実より良く出る。運用に出した瞬間に精度が崩れる。</a:t>
-            </a:r>
-          </a:p>
-        </p:txBody>
-      </p:sp>
-      <p:sp>
-        <p:nvSpPr>
-          <p:cNvPr id="8" name="Rectangle 7"/>
-          <p:cNvSpPr/>
-          <p:nvPr/>
-        </p:nvSpPr>
-        <p:spPr>
-          <a:xfrm>
-            <a:off x="566928" y="4221575"/>
-            <a:ext cx="11057839" cy="9525"/>
-          </a:xfrm>
-          <a:prstGeom prst="rect">
-            <a:avLst/>
-          </a:prstGeom>
-          <a:solidFill>
-            <a:srgbClr val="E5DCCE"/>
-          </a:solidFill>
-          <a:ln>
-            <a:noFill/>
-          </a:ln>
-          <a:effectLst/>
-        </p:spPr>
-        <p:style>
-          <a:lnRef idx="1">
-            <a:schemeClr val="accent1"/>
-          </a:lnRef>
-          <a:fillRef idx="3">
-            <a:schemeClr val="accent1"/>
-          </a:fillRef>
-          <a:effectRef idx="2">
-            <a:schemeClr val="accent1"/>
-          </a:effectRef>
-          <a:fontRef idx="minor">
-            <a:schemeClr val="lt1"/>
-          </a:fontRef>
-        </p:style>
-        <p:txBody>
-          <a:bodyPr rtlCol="0" anchor="ctr"/>
-          <a:lstStyle/>
-          <a:p>
-            <a:pPr algn="ctr"/>
-          </a:p>
-        </p:txBody>
-      </p:sp>
-      <p:sp>
-        <p:nvSpPr>
-          <p:cNvPr id="9" name="build:ghost"/>
-          <p:cNvSpPr txBox="1"/>
-          <p:nvPr/>
-        </p:nvSpPr>
-        <p:spPr>
-          <a:xfrm>
-            <a:off x="566928" y="4398867"/>
-            <a:ext cx="11057839" cy="254000"/>
-          </a:xfrm>
-          <a:prstGeom prst="rect">
-            <a:avLst/>
-          </a:prstGeom>
-          <a:noFill/>
-        </p:spPr>
-        <p:txBody>
-          <a:bodyPr wrap="none" lIns="0" rIns="0" tIns="0" bIns="0">
-            <a:noAutofit/>
-          </a:bodyPr>
-          <a:lstStyle/>
-          <a:p>
-            <a:r>
-              <a:rPr sz="1600" b="1">
-                <a:solidFill>
-                  <a:srgbClr val="C1C9C5"/>
-                </a:solidFill>
-                <a:latin typeface="Avenir Next"/>
-                <a:ea typeface="Hiragino Sans"/>
-                <a:cs typeface="Hiragino Sans"/>
-              </a:rPr>
-              <a:t>③ だから時間順に切る｜過去で学び、未来で試す</a:t>
-            </a:r>
-          </a:p>
-        </p:txBody>
-      </p:sp>
-      <p:sp>
-        <p:nvSpPr>
-          <p:cNvPr id="10" name="build:ghost"/>
-          <p:cNvSpPr txBox="1"/>
-          <p:nvPr/>
-        </p:nvSpPr>
-        <p:spPr>
-          <a:xfrm>
-            <a:off x="822960" y="4690967"/>
-            <a:ext cx="10801807" cy="385762"/>
-          </a:xfrm>
-          <a:prstGeom prst="rect">
-            <a:avLst/>
-          </a:prstGeom>
-          <a:noFill/>
-        </p:spPr>
-        <p:txBody>
-          <a:bodyPr wrap="square" lIns="0" rIns="0" tIns="0" bIns="0">
-            <a:noAutofit/>
-          </a:bodyPr>
-          <a:lstStyle/>
-          <a:p>
-            <a:pPr>
-              <a:lnSpc>
-                <a:spcPct val="130000"/>
-              </a:lnSpc>
-            </a:pPr>
-            <a:r>
-              <a:rPr sz="1500">
-                <a:solidFill>
-                  <a:srgbClr val="C1BCBB"/>
-                </a:solidFill>
-                <a:latin typeface="Avenir Next"/>
-                <a:ea typeface="Hiragino Sans"/>
-                <a:cs typeface="Hiragino Sans"/>
-              </a:rPr>
-              <a:t>実測では、ランダム分割は RMSE を </a:t>
-            </a:r>
-            <a:r>
-              <a:rPr sz="1500" b="1">
-                <a:solidFill>
-                  <a:srgbClr val="C1BCBB"/>
-                </a:solidFill>
-                <a:latin typeface="Avenir Next"/>
-                <a:ea typeface="Hiragino Sans"/>
-                <a:cs typeface="Hiragino Sans"/>
-              </a:rPr>
-              <a:t>41.7 → 36.1 MW</a:t>
-            </a:r>
-            <a:r>
-              <a:rPr sz="1500">
-                <a:solidFill>
-                  <a:srgbClr val="C1BCBB"/>
-                </a:solidFill>
-                <a:latin typeface="Avenir Next"/>
-                <a:ea typeface="Hiragino Sans"/>
-                <a:cs typeface="Hiragino Sans"/>
-              </a:rPr>
-              <a:t> と 14% 過小に見せる。運用では出ない性能である。</a:t>
-            </a:r>
-          </a:p>
-        </p:txBody>
-      </p:sp>
-      <p:sp>
-        <p:nvSpPr>
-          <p:cNvPr id="11" name="TextBox 10"/>
+            <a:r>
+              <a:rPr sz="1400">
+                <a:solidFill>
+                  <a:srgbClr val="71635B"/>
+                </a:solidFill>
+                <a:latin typeface="Avenir Next"/>
+                <a:ea typeface="Hiragino Sans"/>
+                <a:cs typeface="Hiragino Sans"/>
+              </a:rPr>
+              <a:t>未来の情報が学習に混ざると、検証精度は現実より良く出る。運用に出した瞬間に精度が崩れる。　出典｜コード/fig_ch11.py</a:t>
+            </a:r>
+          </a:p>
+        </p:txBody>
+      </p:sp>
+      <p:sp>
+        <p:nvSpPr>
+          <p:cNvPr id="5" name="TextBox 4"/>
           <p:cNvSpPr txBox="1"/>
           <p:nvPr/>
         </p:nvSpPr>
@@ -11287,59 +10721,14 @@
       <p:grpSpPr/>
       <p:sp>
         <p:nvSpPr>
-          <p:cNvPr id="2" name="TextBox 1"/>
+          <p:cNvPr id="2" name="edge:title"/>
           <p:cNvSpPr txBox="1"/>
           <p:nvPr/>
         </p:nvSpPr>
         <p:spPr>
           <a:xfrm>
-            <a:off x="566928" y="457200"/>
-            <a:ext cx="11057839" cy="658368"/>
-          </a:xfrm>
-          <a:prstGeom prst="rect">
-            <a:avLst/>
-          </a:prstGeom>
-          <a:noFill/>
-        </p:spPr>
-        <p:txBody>
-          <a:bodyPr wrap="square" lIns="0" rIns="0" tIns="0" bIns="0" anchor="ctr">
-            <a:noAutofit/>
-          </a:bodyPr>
-          <a:lstStyle/>
-          <a:p>
-            <a:pPr>
-              <a:lnSpc>
-                <a:spcPct val="106000"/>
-              </a:lnSpc>
-              <a:defRPr sz="3390" b="1">
-                <a:solidFill>
-                  <a:srgbClr val="7C332A"/>
-                </a:solidFill>
-                <a:latin typeface="Avenir Next"/>
-                <a:ea typeface="Hiragino Sans"/>
-                <a:cs typeface="Hiragino Sans"/>
-              </a:defRPr>
-            </a:pPr>
-            <a:r>
-              <a:rPr>
-                <a:ea typeface="Hiragino Sans"/>
-                <a:cs typeface="Hiragino Sans"/>
-              </a:rPr>
-              <a:t>導出 — なぜランダム分割をしてはいけないか</a:t>
-            </a:r>
-          </a:p>
-        </p:txBody>
-      </p:sp>
-      <p:sp>
-        <p:nvSpPr>
-          <p:cNvPr id="3" name="TextBox 2"/>
-          <p:cNvSpPr txBox="1"/>
-          <p:nvPr/>
-        </p:nvSpPr>
-        <p:spPr>
-          <a:xfrm>
-            <a:off x="566928" y="2384775"/>
-            <a:ext cx="11057839" cy="254000"/>
+            <a:off x="566928" y="146304"/>
+            <a:ext cx="11057839" cy="457200"/>
           </a:xfrm>
           <a:prstGeom prst="rect">
             <a:avLst/>
@@ -11352,30 +10741,60 @@
           </a:bodyPr>
           <a:lstStyle/>
           <a:p>
-            <a:r>
-              <a:rPr sz="1600" b="1">
-                <a:solidFill>
-                  <a:srgbClr val="5C7268"/>
-                </a:solidFill>
-                <a:latin typeface="Avenir Next"/>
-                <a:ea typeface="Hiragino Sans"/>
-                <a:cs typeface="Hiragino Sans"/>
-              </a:rPr>
-              <a:t>① 時系列は隣が似ている｜自己相関が高い</a:t>
-            </a:r>
-          </a:p>
-        </p:txBody>
-      </p:sp>
-      <p:sp>
-        <p:nvSpPr>
-          <p:cNvPr id="4" name="TextBox 3"/>
+            <a:pPr>
+              <a:defRPr sz="2400" b="1">
+                <a:solidFill>
+                  <a:srgbClr val="7C332A"/>
+                </a:solidFill>
+                <a:latin typeface="Avenir Next"/>
+                <a:ea typeface="Hiragino Sans"/>
+                <a:cs typeface="Hiragino Sans"/>
+              </a:defRPr>
+            </a:pPr>
+            <a:r>
+              <a:rPr>
+                <a:ea typeface="Hiragino Sans"/>
+                <a:cs typeface="Hiragino Sans"/>
+              </a:rPr>
+              <a:t>導出 — なぜランダム分割をしてはいけないか</a:t>
+            </a:r>
+          </a:p>
+        </p:txBody>
+      </p:sp>
+      <p:pic>
+        <p:nvPicPr>
+          <p:cNvPr id="3" name="Picture 2" descr="ch11_deriv_split_3.png"/>
+          <p:cNvPicPr>
+            <a:picLocks noChangeAspect="1"/>
+          </p:cNvPicPr>
+          <p:nvPr/>
+        </p:nvPicPr>
+        <p:blipFill>
+          <a:blip r:embed="rId2"/>
+          <a:stretch>
+            <a:fillRect/>
+          </a:stretch>
+        </p:blipFill>
+        <p:spPr>
+          <a:xfrm>
+            <a:off x="310469" y="713232"/>
+            <a:ext cx="11570757" cy="5532120"/>
+          </a:xfrm>
+          <a:prstGeom prst="rect">
+            <a:avLst/>
+          </a:prstGeom>
+        </p:spPr>
+      </p:pic>
+      <p:sp>
+        <p:nvSpPr>
+          <p:cNvPr id="4" name="edge:caption"/>
           <p:cNvSpPr txBox="1"/>
           <p:nvPr/>
         </p:nvSpPr>
         <p:spPr>
           <a:xfrm>
-            <a:off x="822960" y="2676875"/>
-            <a:ext cx="10801807" cy="385762"/>
+            <a:off x="228600" y="6300216"/>
+            <a:ext cx="11734495" cy="310896"/>
           </a:xfrm>
           <a:prstGeom prst="rect">
             <a:avLst/>
@@ -11388,292 +10807,24 @@
           </a:bodyPr>
           <a:lstStyle/>
           <a:p>
-            <a:pPr>
-              <a:lnSpc>
-                <a:spcPct val="130000"/>
-              </a:lnSpc>
-            </a:pPr>
-            <a:r>
-              <a:rPr sz="1500">
-                <a:solidFill>
-                  <a:srgbClr val="33221E"/>
-                </a:solidFill>
-                <a:latin typeface="Avenir Next"/>
-                <a:ea typeface="Hiragino Sans"/>
-                <a:cs typeface="Hiragino Sans"/>
-              </a:rPr>
-              <a:t>1 時間前との相関はほぼ 1。ランダムに分けると、検証データの「すぐ隣」が学習に入ってしまう。</a:t>
-            </a:r>
-          </a:p>
-        </p:txBody>
-      </p:sp>
-      <p:sp>
-        <p:nvSpPr>
-          <p:cNvPr id="5" name="Rectangle 4"/>
-          <p:cNvSpPr/>
-          <p:nvPr/>
-        </p:nvSpPr>
-        <p:spPr>
-          <a:xfrm>
-            <a:off x="566928" y="3214529"/>
-            <a:ext cx="11057839" cy="9525"/>
-          </a:xfrm>
-          <a:prstGeom prst="rect">
-            <a:avLst/>
-          </a:prstGeom>
-          <a:solidFill>
-            <a:srgbClr val="E5DCCE"/>
-          </a:solidFill>
-          <a:ln>
-            <a:noFill/>
-          </a:ln>
-          <a:effectLst/>
-        </p:spPr>
-        <p:style>
-          <a:lnRef idx="1">
-            <a:schemeClr val="accent1"/>
-          </a:lnRef>
-          <a:fillRef idx="3">
-            <a:schemeClr val="accent1"/>
-          </a:fillRef>
-          <a:effectRef idx="2">
-            <a:schemeClr val="accent1"/>
-          </a:effectRef>
-          <a:fontRef idx="minor">
-            <a:schemeClr val="lt1"/>
-          </a:fontRef>
-        </p:style>
-        <p:txBody>
-          <a:bodyPr rtlCol="0" anchor="ctr"/>
-          <a:lstStyle/>
-          <a:p>
             <a:pPr algn="ctr"/>
-          </a:p>
-        </p:txBody>
-      </p:sp>
-      <p:sp>
-        <p:nvSpPr>
-          <p:cNvPr id="6" name="TextBox 5"/>
-          <p:cNvSpPr txBox="1"/>
-          <p:nvPr/>
-        </p:nvSpPr>
-        <p:spPr>
-          <a:xfrm>
-            <a:off x="566928" y="3391821"/>
-            <a:ext cx="11057839" cy="254000"/>
-          </a:xfrm>
-          <a:prstGeom prst="rect">
-            <a:avLst/>
-          </a:prstGeom>
-          <a:noFill/>
-        </p:spPr>
-        <p:txBody>
-          <a:bodyPr wrap="none" lIns="0" rIns="0" tIns="0" bIns="0">
-            <a:noAutofit/>
-          </a:bodyPr>
-          <a:lstStyle/>
-          <a:p>
-            <a:r>
-              <a:rPr sz="1600" b="1">
-                <a:solidFill>
-                  <a:srgbClr val="5C7268"/>
-                </a:solidFill>
-                <a:latin typeface="Avenir Next"/>
-                <a:ea typeface="Hiragino Sans"/>
-                <a:cs typeface="Hiragino Sans"/>
-              </a:rPr>
-              <a:t>② それは実質的に答えを見ている｜リーク</a:t>
-            </a:r>
-          </a:p>
-        </p:txBody>
-      </p:sp>
-      <p:sp>
-        <p:nvSpPr>
-          <p:cNvPr id="7" name="TextBox 6"/>
-          <p:cNvSpPr txBox="1"/>
-          <p:nvPr/>
-        </p:nvSpPr>
-        <p:spPr>
-          <a:xfrm>
-            <a:off x="822960" y="3683921"/>
-            <a:ext cx="10801807" cy="385762"/>
-          </a:xfrm>
-          <a:prstGeom prst="rect">
-            <a:avLst/>
-          </a:prstGeom>
-          <a:noFill/>
-        </p:spPr>
-        <p:txBody>
-          <a:bodyPr wrap="square" lIns="0" rIns="0" tIns="0" bIns="0">
-            <a:noAutofit/>
-          </a:bodyPr>
-          <a:lstStyle/>
-          <a:p>
-            <a:pPr>
-              <a:lnSpc>
-                <a:spcPct val="130000"/>
-              </a:lnSpc>
-            </a:pPr>
-            <a:r>
-              <a:rPr sz="1500">
-                <a:solidFill>
-                  <a:srgbClr val="33221E"/>
-                </a:solidFill>
-                <a:latin typeface="Avenir Next"/>
-                <a:ea typeface="Hiragino Sans"/>
-                <a:cs typeface="Hiragino Sans"/>
-              </a:rPr>
-              <a:t>未来の情報が学習に混ざると、検証精度は現実より良く出る。運用に出した瞬間に精度が崩れる。</a:t>
-            </a:r>
-          </a:p>
-        </p:txBody>
-      </p:sp>
-      <p:sp>
-        <p:nvSpPr>
-          <p:cNvPr id="8" name="Rectangle 7"/>
-          <p:cNvSpPr/>
-          <p:nvPr/>
-        </p:nvSpPr>
-        <p:spPr>
-          <a:xfrm>
-            <a:off x="566928" y="4221575"/>
-            <a:ext cx="11057839" cy="9525"/>
-          </a:xfrm>
-          <a:prstGeom prst="rect">
-            <a:avLst/>
-          </a:prstGeom>
-          <a:solidFill>
-            <a:srgbClr val="E5DCCE"/>
-          </a:solidFill>
-          <a:ln>
-            <a:noFill/>
-          </a:ln>
-          <a:effectLst/>
-        </p:spPr>
-        <p:style>
-          <a:lnRef idx="1">
-            <a:schemeClr val="accent1"/>
-          </a:lnRef>
-          <a:fillRef idx="3">
-            <a:schemeClr val="accent1"/>
-          </a:fillRef>
-          <a:effectRef idx="2">
-            <a:schemeClr val="accent1"/>
-          </a:effectRef>
-          <a:fontRef idx="minor">
-            <a:schemeClr val="lt1"/>
-          </a:fontRef>
-        </p:style>
-        <p:txBody>
-          <a:bodyPr rtlCol="0" anchor="ctr"/>
-          <a:lstStyle/>
-          <a:p>
-            <a:pPr algn="ctr"/>
-          </a:p>
-        </p:txBody>
-      </p:sp>
-      <p:sp>
-        <p:nvSpPr>
-          <p:cNvPr id="9" name="TextBox 8"/>
-          <p:cNvSpPr txBox="1"/>
-          <p:nvPr/>
-        </p:nvSpPr>
-        <p:spPr>
-          <a:xfrm>
-            <a:off x="566928" y="4398867"/>
-            <a:ext cx="11057839" cy="254000"/>
-          </a:xfrm>
-          <a:prstGeom prst="rect">
-            <a:avLst/>
-          </a:prstGeom>
-          <a:noFill/>
-        </p:spPr>
-        <p:txBody>
-          <a:bodyPr wrap="none" lIns="0" rIns="0" tIns="0" bIns="0">
-            <a:noAutofit/>
-          </a:bodyPr>
-          <a:lstStyle/>
-          <a:p>
-            <a:r>
-              <a:rPr sz="1600" b="1">
-                <a:solidFill>
-                  <a:srgbClr val="5C7268"/>
-                </a:solidFill>
-                <a:latin typeface="Avenir Next"/>
-                <a:ea typeface="Hiragino Sans"/>
-                <a:cs typeface="Hiragino Sans"/>
-              </a:rPr>
-              <a:t>③ だから時間順に切る｜過去で学び、未来で試す</a:t>
-            </a:r>
-          </a:p>
-        </p:txBody>
-      </p:sp>
-      <p:sp>
-        <p:nvSpPr>
-          <p:cNvPr id="10" name="TextBox 9"/>
-          <p:cNvSpPr txBox="1"/>
-          <p:nvPr/>
-        </p:nvSpPr>
-        <p:spPr>
-          <a:xfrm>
-            <a:off x="822960" y="4690967"/>
-            <a:ext cx="10801807" cy="385762"/>
-          </a:xfrm>
-          <a:prstGeom prst="rect">
-            <a:avLst/>
-          </a:prstGeom>
-          <a:noFill/>
-        </p:spPr>
-        <p:txBody>
-          <a:bodyPr wrap="square" lIns="0" rIns="0" tIns="0" bIns="0">
-            <a:noAutofit/>
-          </a:bodyPr>
-          <a:lstStyle/>
-          <a:p>
-            <a:pPr>
-              <a:lnSpc>
-                <a:spcPct val="130000"/>
-              </a:lnSpc>
-            </a:pPr>
-            <a:r>
-              <a:rPr sz="1500">
-                <a:solidFill>
-                  <a:srgbClr val="33221E"/>
-                </a:solidFill>
-                <a:latin typeface="Avenir Next"/>
-                <a:ea typeface="Hiragino Sans"/>
-                <a:cs typeface="Hiragino Sans"/>
-              </a:rPr>
-              <a:t>実測では、ランダム分割は RMSE を </a:t>
-            </a:r>
-            <a:r>
-              <a:rPr sz="1500" b="1">
-                <a:solidFill>
-                  <a:srgbClr val="33221E"/>
-                </a:solidFill>
-                <a:latin typeface="Avenir Next"/>
-                <a:ea typeface="Hiragino Sans"/>
-                <a:cs typeface="Hiragino Sans"/>
-              </a:rPr>
-              <a:t>41.7 → 36.1 MW</a:t>
-            </a:r>
-            <a:r>
-              <a:rPr sz="1500">
-                <a:solidFill>
-                  <a:srgbClr val="33221E"/>
-                </a:solidFill>
-                <a:latin typeface="Avenir Next"/>
-                <a:ea typeface="Hiragino Sans"/>
-                <a:cs typeface="Hiragino Sans"/>
-              </a:rPr>
-              <a:t> と 14% 過小に見せる。運用では出ない性能である。</a:t>
-            </a:r>
-          </a:p>
-        </p:txBody>
-      </p:sp>
-      <p:sp>
-        <p:nvSpPr>
-          <p:cNvPr id="11" name="TextBox 10"/>
+            <a:r>
+              <a:rPr sz="1400">
+                <a:solidFill>
+                  <a:srgbClr val="71635B"/>
+                </a:solidFill>
+                <a:latin typeface="Avenir Next"/>
+                <a:ea typeface="Hiragino Sans"/>
+                <a:cs typeface="Hiragino Sans"/>
+              </a:rPr>
+              <a:t>実測では、ランダム分割は RMSE を 41.7 → 36.1 MW と 14% 過小に見せる。運用では出ない性能である。　出典｜コード/fig_ch11.py</a:t>
+            </a:r>
+          </a:p>
+        </p:txBody>
+      </p:sp>
+      <p:sp>
+        <p:nvSpPr>
+          <p:cNvPr id="5" name="TextBox 4"/>
           <p:cNvSpPr txBox="1"/>
           <p:nvPr/>
         </p:nvSpPr>
